--- a/СМЕНА_Очаково_решение.pptx
+++ b/СМЕНА_Очаково_решение.pptx
@@ -3402,7 +3402,7 @@
                 </a:solidFill>
                 <a:latin typeface="Segoe UI"/>
               </a:rPr>
-              <a:t>23–25 октября 2026 · прототип: ochakovo_smena/index.html</a:t>
+              <a:t>23–25 октября 2026 · прототип: bell-igor.github.io/change</a:t>
             </a:r>
           </a:p>
         </p:txBody>
@@ -5297,7 +5297,7 @@
                 </a:solidFill>
                 <a:latin typeface="Segoe UI"/>
               </a:rPr>
-              <a:t>Прототип, README и презентация — в личном кабинете участника.</a:t>
+              <a:t>Прототип уже опубликован и открывается в браузере — с телефона или ноутбука.</a:t>
             </a:r>
           </a:p>
           <a:p>
@@ -5316,7 +5316,7 @@
                 </a:solidFill>
                 <a:latin typeface="Segoe UI"/>
               </a:rPr>
-              <a:t>Открывается двойным щелчком по index.html, без интернета и установки.</a:t>
+              <a:t>Там же README, презентация и остальные материалы решения.</a:t>
             </a:r>
           </a:p>
         </p:txBody>
@@ -5330,7 +5330,7 @@
         <p:spPr>
           <a:xfrm>
             <a:off x="822960" y="3886200"/>
-            <a:ext cx="5120640" cy="1554480"/>
+            <a:ext cx="5669280" cy="1554480"/>
           </a:xfrm>
           <a:prstGeom prst="roundRect">
             <a:avLst>
@@ -5360,7 +5360,7 @@
         <p:spPr>
           <a:xfrm>
             <a:off x="1097280" y="4069080"/>
-            <a:ext cx="4572000" cy="274320"/>
+            <a:ext cx="5120640" cy="274320"/>
           </a:xfrm>
           <a:prstGeom prst="rect">
             <a:avLst/>
@@ -5402,7 +5402,7 @@
         <p:spPr>
           <a:xfrm>
             <a:off x="1097280" y="4389120"/>
-            <a:ext cx="4663440" cy="822960"/>
+            <a:ext cx="5212080" cy="822960"/>
           </a:xfrm>
           <a:prstGeom prst="rect">
             <a:avLst/>
@@ -5424,13 +5424,13 @@
               </a:spcAft>
             </a:pPr>
             <a:r>
-              <a:rPr sz="1100" b="0" i="0">
+              <a:rPr sz="1050" b="0" i="0">
                 <a:solidFill>
                   <a:srgbClr val="FFFFFF"/>
                 </a:solidFill>
                 <a:latin typeface="Segoe UI"/>
               </a:rPr>
-              <a:t>index.html — чистый старт</a:t>
+              <a:t>bell-igor.github.io/change — играть</a:t>
             </a:r>
           </a:p>
           <a:p>
@@ -5443,13 +5443,13 @@
               </a:spcAft>
             </a:pPr>
             <a:r>
-              <a:rPr sz="1100" b="0" i="0">
+              <a:rPr sz="1050" b="0" i="0">
                 <a:solidFill>
                   <a:srgbClr val="FFFFFF"/>
                 </a:solidFill>
                 <a:latin typeface="Segoe UI"/>
               </a:rPr>
-              <a:t>index.html?demo=1#s-hr — панель HR</a:t>
+              <a:t>…/change/?demo=1 — финал игрока</a:t>
             </a:r>
           </a:p>
           <a:p>
@@ -5462,13 +5462,13 @@
               </a:spcAft>
             </a:pPr>
             <a:r>
-              <a:rPr sz="1100" b="0" i="0">
+              <a:rPr sz="1050" b="0" i="0">
                 <a:solidFill>
                   <a:srgbClr val="FFFFFF"/>
                 </a:solidFill>
                 <a:latin typeface="Segoe UI"/>
               </a:rPr>
-              <a:t>index.html?demo=1#s-flavor — лаборатория вкуса</a:t>
+              <a:t>…/change/?demo=1#s-hr — панель HR</a:t>
             </a:r>
           </a:p>
         </p:txBody>
